--- a/Laboratory Latex/Lab05HighLowWithHints/LMS Upload Lab05/Lab05 presentation.pptx
+++ b/Laboratory Latex/Lab05HighLowWithHints/LMS Upload Lab05/Lab05 presentation.pptx
@@ -2,23 +2,23 @@
 <file path=ppt/presentation.xml><?xml version="1.0" encoding="utf-8"?>
 <p:presentation xmlns:a="http://schemas.openxmlformats.org/drawingml/2006/main" xmlns:r="http://schemas.openxmlformats.org/officeDocument/2006/relationships" xmlns:p="http://schemas.openxmlformats.org/presentationml/2006/main" saveSubsetFonts="1" autoCompressPictures="0">
   <p:sldMasterIdLst>
-    <p:sldMasterId id="2147483648" r:id="rId1"/>
+    <p:sldMasterId id="2147483648" r:id="rId4"/>
   </p:sldMasterIdLst>
   <p:notesMasterIdLst>
-    <p:notesMasterId r:id="rId10"/>
+    <p:notesMasterId r:id="rId13"/>
   </p:notesMasterIdLst>
   <p:handoutMasterIdLst>
-    <p:handoutMasterId r:id="rId11"/>
+    <p:handoutMasterId r:id="rId14"/>
   </p:handoutMasterIdLst>
   <p:sldIdLst>
-    <p:sldId id="262" r:id="rId2"/>
-    <p:sldId id="538" r:id="rId3"/>
-    <p:sldId id="557" r:id="rId4"/>
-    <p:sldId id="638" r:id="rId5"/>
-    <p:sldId id="593" r:id="rId6"/>
-    <p:sldId id="635" r:id="rId7"/>
-    <p:sldId id="636" r:id="rId8"/>
-    <p:sldId id="620" r:id="rId9"/>
+    <p:sldId id="262" r:id="rId5"/>
+    <p:sldId id="538" r:id="rId6"/>
+    <p:sldId id="557" r:id="rId7"/>
+    <p:sldId id="638" r:id="rId8"/>
+    <p:sldId id="593" r:id="rId9"/>
+    <p:sldId id="635" r:id="rId10"/>
+    <p:sldId id="636" r:id="rId11"/>
+    <p:sldId id="620" r:id="rId12"/>
   </p:sldIdLst>
   <p:sldSz cx="12192000" cy="6858000"/>
   <p:notesSz cx="6858000" cy="9144000"/>
@@ -210,7 +210,7 @@
           <a:p>
             <a:fld id="{E4DD5C9C-88A3-CA43-B162-DCC4E1E4BE7D}" type="datetimeFigureOut">
               <a:rPr lang="en-US" smtClean="0"/>
-              <a:t>10/13/2025</a:t>
+              <a:t>3/9/2026</a:t>
             </a:fld>
             <a:endParaRPr lang="en-US"/>
           </a:p>
@@ -375,7 +375,7 @@
           <a:p>
             <a:fld id="{BC5E4000-89B6-4F22-834E-B172C4AA57D1}" type="datetimeFigureOut">
               <a:rPr lang="en-US" smtClean="0"/>
-              <a:t>10/13/2025</a:t>
+              <a:t>3/9/2026</a:t>
             </a:fld>
             <a:endParaRPr lang="en-US"/>
           </a:p>
@@ -1435,7 +1435,7 @@
           <a:p>
             <a:fld id="{8923E60E-3077-9A4D-B784-FBCD6B1A2E3F}" type="datetimeFigureOut">
               <a:rPr lang="en-US" smtClean="0"/>
-              <a:t>10/13/2025</a:t>
+              <a:t>3/9/2026</a:t>
             </a:fld>
             <a:endParaRPr lang="en-US"/>
           </a:p>
@@ -2051,7 +2051,7 @@
           <a:p>
             <a:fld id="{8923E60E-3077-9A4D-B784-FBCD6B1A2E3F}" type="datetimeFigureOut">
               <a:rPr lang="en-US" smtClean="0"/>
-              <a:t>10/13/2025</a:t>
+              <a:t>3/9/2026</a:t>
             </a:fld>
             <a:endParaRPr lang="en-US"/>
           </a:p>
@@ -2528,7 +2528,7 @@
           <a:p>
             <a:fld id="{8923E60E-3077-9A4D-B784-FBCD6B1A2E3F}" type="datetimeFigureOut">
               <a:rPr lang="en-US" smtClean="0"/>
-              <a:t>10/13/2025</a:t>
+              <a:t>3/9/2026</a:t>
             </a:fld>
             <a:endParaRPr lang="en-US"/>
           </a:p>
@@ -2765,7 +2765,7 @@
           <a:p>
             <a:fld id="{8923E60E-3077-9A4D-B784-FBCD6B1A2E3F}" type="datetimeFigureOut">
               <a:rPr lang="en-US" smtClean="0"/>
-              <a:t>10/13/2025</a:t>
+              <a:t>3/9/2026</a:t>
             </a:fld>
             <a:endParaRPr lang="en-US"/>
           </a:p>
@@ -3120,7 +3120,7 @@
           <a:p>
             <a:fld id="{8923E60E-3077-9A4D-B784-FBCD6B1A2E3F}" type="datetimeFigureOut">
               <a:rPr lang="en-US" smtClean="0"/>
-              <a:t>10/13/2025</a:t>
+              <a:t>3/9/2026</a:t>
             </a:fld>
             <a:endParaRPr lang="en-US"/>
           </a:p>
@@ -3587,7 +3587,7 @@
           <a:p>
             <a:fld id="{8923E60E-3077-9A4D-B784-FBCD6B1A2E3F}" type="datetimeFigureOut">
               <a:rPr lang="en-US" smtClean="0"/>
-              <a:t>10/13/2025</a:t>
+              <a:t>3/9/2026</a:t>
             </a:fld>
             <a:endParaRPr lang="en-US"/>
           </a:p>
@@ -3932,7 +3932,7 @@
           <a:p>
             <a:fld id="{8923E60E-3077-9A4D-B784-FBCD6B1A2E3F}" type="datetimeFigureOut">
               <a:rPr lang="en-US" smtClean="0"/>
-              <a:t>10/13/2025</a:t>
+              <a:t>3/9/2026</a:t>
             </a:fld>
             <a:endParaRPr lang="en-US"/>
           </a:p>
@@ -4289,7 +4289,7 @@
           <a:p>
             <a:fld id="{8923E60E-3077-9A4D-B784-FBCD6B1A2E3F}" type="datetimeFigureOut">
               <a:rPr lang="en-US" smtClean="0"/>
-              <a:t>10/13/2025</a:t>
+              <a:t>3/9/2026</a:t>
             </a:fld>
             <a:endParaRPr lang="en-US"/>
           </a:p>
@@ -4830,7 +4830,7 @@
           <a:p>
             <a:fld id="{8923E60E-3077-9A4D-B784-FBCD6B1A2E3F}" type="datetimeFigureOut">
               <a:rPr lang="en-US" smtClean="0"/>
-              <a:t>10/13/2025</a:t>
+              <a:t>3/9/2026</a:t>
             </a:fld>
             <a:endParaRPr lang="en-US"/>
           </a:p>
@@ -5124,7 +5124,7 @@
           <a:p>
             <a:fld id="{8923E60E-3077-9A4D-B784-FBCD6B1A2E3F}" type="datetimeFigureOut">
               <a:rPr lang="en-US" smtClean="0"/>
-              <a:t>10/13/2025</a:t>
+              <a:t>3/9/2026</a:t>
             </a:fld>
             <a:endParaRPr lang="en-US"/>
           </a:p>
@@ -5388,7 +5388,7 @@
           <a:p>
             <a:fld id="{8923E60E-3077-9A4D-B784-FBCD6B1A2E3F}" type="datetimeFigureOut">
               <a:rPr lang="en-US" smtClean="0"/>
-              <a:t>10/13/2025</a:t>
+              <a:t>3/9/2026</a:t>
             </a:fld>
             <a:endParaRPr lang="en-US"/>
           </a:p>
@@ -7158,7 +7158,7 @@
         </p:blipFill>
         <p:spPr>
           <a:xfrm>
-            <a:off x="3917738" y="2058183"/>
+            <a:off x="3392637" y="1460654"/>
             <a:ext cx="6353764" cy="4434690"/>
           </a:xfrm>
           <a:prstGeom prst="rect">
@@ -8382,6 +8382,15 @@
 </file>
 
 <file path=customXml/item1.xml><?xml version="1.0" encoding="utf-8"?>
+<?mso-contentType ?>
+<FormTemplates xmlns="http://schemas.microsoft.com/sharepoint/v3/contenttype/forms">
+  <Display>DocumentLibraryForm</Display>
+  <Edit>DocumentLibraryForm</Edit>
+  <New>DocumentLibraryForm</New>
+</FormTemplates>
+</file>
+
+<file path=customXml/item2.xml><?xml version="1.0" encoding="utf-8"?>
 <ct:contentTypeSchema xmlns:ct="http://schemas.microsoft.com/office/2006/metadata/contentType" xmlns:ma="http://schemas.microsoft.com/office/2006/metadata/properties/metaAttributes" ct:_="" ma:_="" ma:contentTypeName="Document" ma:contentTypeID="0x010100B0CA56346D718341AD6F7BE32044DEA3" ma:contentTypeVersion="3" ma:contentTypeDescription="Create a new document." ma:contentTypeScope="" ma:versionID="291df287ff1ec43df0b312dda8e1454e">
   <xsd:schema xmlns:xsd="http://www.w3.org/2001/XMLSchema" xmlns:xs="http://www.w3.org/2001/XMLSchema" xmlns:p="http://schemas.microsoft.com/office/2006/metadata/properties" xmlns:ns2="e54ece5e-ea3e-475a-a07c-9da9db720c35" targetNamespace="http://schemas.microsoft.com/office/2006/metadata/properties" ma:root="true" ma:fieldsID="2af1a4df17c9c95860ef326849b47e11" ns2:_="">
     <xsd:import namespace="e54ece5e-ea3e-475a-a07c-9da9db720c35"/>
@@ -8519,15 +8528,6 @@
 </ct:contentTypeSchema>
 </file>
 
-<file path=customXml/item2.xml><?xml version="1.0" encoding="utf-8"?>
-<?mso-contentType ?>
-<FormTemplates xmlns="http://schemas.microsoft.com/sharepoint/v3/contenttype/forms">
-  <Display>DocumentLibraryForm</Display>
-  <Edit>DocumentLibraryForm</Edit>
-  <New>DocumentLibraryForm</New>
-</FormTemplates>
-</file>
-
 <file path=customXml/item3.xml><?xml version="1.0" encoding="utf-8"?>
 <p:properties xmlns:p="http://schemas.microsoft.com/office/2006/metadata/properties" xmlns:xsi="http://www.w3.org/2001/XMLSchema-instance" xmlns:pc="http://schemas.microsoft.com/office/infopath/2007/PartnerControls">
   <documentManagement/>
@@ -8535,13 +8535,36 @@
 </file>
 
 <file path=customXml/itemProps1.xml><?xml version="1.0" encoding="utf-8"?>
-<ds:datastoreItem xmlns:ds="http://schemas.openxmlformats.org/officeDocument/2006/customXml" ds:itemID="{80C7D843-D91E-41FB-8D2D-C2BE94CD790F}"/>
+<ds:datastoreItem xmlns:ds="http://schemas.openxmlformats.org/officeDocument/2006/customXml" ds:itemID="{211550C6-DC6E-4A5E-9402-A2EC382D827D}">
+  <ds:schemaRefs>
+    <ds:schemaRef ds:uri="http://schemas.microsoft.com/sharepoint/v3/contenttype/forms"/>
+  </ds:schemaRefs>
+</ds:datastoreItem>
 </file>
 
 <file path=customXml/itemProps2.xml><?xml version="1.0" encoding="utf-8"?>
-<ds:datastoreItem xmlns:ds="http://schemas.openxmlformats.org/officeDocument/2006/customXml" ds:itemID="{211550C6-DC6E-4A5E-9402-A2EC382D827D}"/>
+<ds:datastoreItem xmlns:ds="http://schemas.openxmlformats.org/officeDocument/2006/customXml" ds:itemID="{80C7D843-D91E-41FB-8D2D-C2BE94CD790F}">
+  <ds:schemaRefs>
+    <ds:schemaRef ds:uri="http://schemas.microsoft.com/office/2006/metadata/contentType"/>
+    <ds:schemaRef ds:uri="http://schemas.microsoft.com/office/2006/metadata/properties/metaAttributes"/>
+    <ds:schemaRef ds:uri="http://www.w3.org/2001/XMLSchema"/>
+    <ds:schemaRef ds:uri="http://schemas.microsoft.com/office/2006/metadata/properties"/>
+    <ds:schemaRef ds:uri="e54ece5e-ea3e-475a-a07c-9da9db720c35"/>
+    <ds:schemaRef ds:uri="http://schemas.microsoft.com/office/2006/documentManagement/types"/>
+    <ds:schemaRef ds:uri="http://schemas.microsoft.com/office/infopath/2007/PartnerControls"/>
+    <ds:schemaRef ds:uri="http://schemas.openxmlformats.org/package/2006/metadata/core-properties"/>
+    <ds:schemaRef ds:uri="http://purl.org/dc/elements/1.1/"/>
+    <ds:schemaRef ds:uri="http://purl.org/dc/terms/"/>
+    <ds:schemaRef ds:uri="http://schemas.microsoft.com/internal/obd"/>
+  </ds:schemaRefs>
+</ds:datastoreItem>
 </file>
 
 <file path=customXml/itemProps3.xml><?xml version="1.0" encoding="utf-8"?>
-<ds:datastoreItem xmlns:ds="http://schemas.openxmlformats.org/officeDocument/2006/customXml" ds:itemID="{FFFDA1C9-CB3D-4314-9E88-5D78EAF66852}"/>
+<ds:datastoreItem xmlns:ds="http://schemas.openxmlformats.org/officeDocument/2006/customXml" ds:itemID="{FFFDA1C9-CB3D-4314-9E88-5D78EAF66852}">
+  <ds:schemaRefs>
+    <ds:schemaRef ds:uri="http://schemas.microsoft.com/office/2006/metadata/properties"/>
+    <ds:schemaRef ds:uri="http://schemas.microsoft.com/office/infopath/2007/PartnerControls"/>
+  </ds:schemaRefs>
+</ds:datastoreItem>
 </file>